--- a/Weekly-Reports/AuxilaryPowerSupply.pptx
+++ b/Weekly-Reports/AuxilaryPowerSupply.pptx
@@ -163,7 +163,7 @@
           </a:lstStyle>
           <a:p>
             <a:r>
-              <a:rPr lang="en-US" smtClean="0"/>
+              <a:rPr lang="en-US"/>
               <a:t>Click to edit Master title style</a:t>
             </a:r>
             <a:endParaRPr lang="sv-SE"/>
@@ -228,7 +228,7 @@
           </a:lstStyle>
           <a:p>
             <a:r>
-              <a:rPr lang="en-US" smtClean="0"/>
+              <a:rPr lang="en-US"/>
               <a:t>Click to edit Master subtitle style</a:t>
             </a:r>
             <a:endParaRPr lang="sv-SE"/>
@@ -252,7 +252,7 @@
           <a:p>
             <a:fld id="{98555210-FA09-4373-AFCC-33C76A1B3FFC}" type="datetimeFigureOut">
               <a:rPr lang="sv-SE" smtClean="0"/>
-              <a:t>2026-02-06</a:t>
+              <a:t>2026-03-05</a:t>
             </a:fld>
             <a:endParaRPr lang="sv-SE"/>
           </a:p>
@@ -346,7 +346,7 @@
           <a:lstStyle/>
           <a:p>
             <a:r>
-              <a:rPr lang="en-US" smtClean="0"/>
+              <a:rPr lang="en-US"/>
               <a:t>Click to edit Master title style</a:t>
             </a:r>
             <a:endParaRPr lang="sv-SE"/>
@@ -370,35 +370,35 @@
           <a:p>
             <a:pPr lvl="0"/>
             <a:r>
-              <a:rPr lang="en-US" smtClean="0"/>
+              <a:rPr lang="en-US"/>
               <a:t>Edit Master text styles</a:t>
             </a:r>
           </a:p>
           <a:p>
             <a:pPr lvl="1"/>
             <a:r>
-              <a:rPr lang="en-US" smtClean="0"/>
+              <a:rPr lang="en-US"/>
               <a:t>Second level</a:t>
             </a:r>
           </a:p>
           <a:p>
             <a:pPr lvl="2"/>
             <a:r>
-              <a:rPr lang="en-US" smtClean="0"/>
+              <a:rPr lang="en-US"/>
               <a:t>Third level</a:t>
             </a:r>
           </a:p>
           <a:p>
             <a:pPr lvl="3"/>
             <a:r>
-              <a:rPr lang="en-US" smtClean="0"/>
+              <a:rPr lang="en-US"/>
               <a:t>Fourth level</a:t>
             </a:r>
           </a:p>
           <a:p>
             <a:pPr lvl="4"/>
             <a:r>
-              <a:rPr lang="en-US" smtClean="0"/>
+              <a:rPr lang="en-US"/>
               <a:t>Fifth level</a:t>
             </a:r>
             <a:endParaRPr lang="sv-SE"/>
@@ -422,7 +422,7 @@
           <a:p>
             <a:fld id="{98555210-FA09-4373-AFCC-33C76A1B3FFC}" type="datetimeFigureOut">
               <a:rPr lang="sv-SE" smtClean="0"/>
-              <a:t>2026-02-06</a:t>
+              <a:t>2026-03-05</a:t>
             </a:fld>
             <a:endParaRPr lang="sv-SE"/>
           </a:p>
@@ -521,7 +521,7 @@
           <a:lstStyle/>
           <a:p>
             <a:r>
-              <a:rPr lang="en-US" smtClean="0"/>
+              <a:rPr lang="en-US"/>
               <a:t>Click to edit Master title style</a:t>
             </a:r>
             <a:endParaRPr lang="sv-SE"/>
@@ -550,35 +550,35 @@
           <a:p>
             <a:pPr lvl="0"/>
             <a:r>
-              <a:rPr lang="en-US" smtClean="0"/>
+              <a:rPr lang="en-US"/>
               <a:t>Edit Master text styles</a:t>
             </a:r>
           </a:p>
           <a:p>
             <a:pPr lvl="1"/>
             <a:r>
-              <a:rPr lang="en-US" smtClean="0"/>
+              <a:rPr lang="en-US"/>
               <a:t>Second level</a:t>
             </a:r>
           </a:p>
           <a:p>
             <a:pPr lvl="2"/>
             <a:r>
-              <a:rPr lang="en-US" smtClean="0"/>
+              <a:rPr lang="en-US"/>
               <a:t>Third level</a:t>
             </a:r>
           </a:p>
           <a:p>
             <a:pPr lvl="3"/>
             <a:r>
-              <a:rPr lang="en-US" smtClean="0"/>
+              <a:rPr lang="en-US"/>
               <a:t>Fourth level</a:t>
             </a:r>
           </a:p>
           <a:p>
             <a:pPr lvl="4"/>
             <a:r>
-              <a:rPr lang="en-US" smtClean="0"/>
+              <a:rPr lang="en-US"/>
               <a:t>Fifth level</a:t>
             </a:r>
             <a:endParaRPr lang="sv-SE"/>
@@ -602,7 +602,7 @@
           <a:p>
             <a:fld id="{98555210-FA09-4373-AFCC-33C76A1B3FFC}" type="datetimeFigureOut">
               <a:rPr lang="sv-SE" smtClean="0"/>
-              <a:t>2026-02-06</a:t>
+              <a:t>2026-03-05</a:t>
             </a:fld>
             <a:endParaRPr lang="sv-SE"/>
           </a:p>
@@ -696,7 +696,7 @@
           <a:lstStyle/>
           <a:p>
             <a:r>
-              <a:rPr lang="en-US" smtClean="0"/>
+              <a:rPr lang="en-US"/>
               <a:t>Click to edit Master title style</a:t>
             </a:r>
             <a:endParaRPr lang="sv-SE"/>
@@ -720,35 +720,35 @@
           <a:p>
             <a:pPr lvl="0"/>
             <a:r>
-              <a:rPr lang="en-US" smtClean="0"/>
+              <a:rPr lang="en-US"/>
               <a:t>Edit Master text styles</a:t>
             </a:r>
           </a:p>
           <a:p>
             <a:pPr lvl="1"/>
             <a:r>
-              <a:rPr lang="en-US" smtClean="0"/>
+              <a:rPr lang="en-US"/>
               <a:t>Second level</a:t>
             </a:r>
           </a:p>
           <a:p>
             <a:pPr lvl="2"/>
             <a:r>
-              <a:rPr lang="en-US" smtClean="0"/>
+              <a:rPr lang="en-US"/>
               <a:t>Third level</a:t>
             </a:r>
           </a:p>
           <a:p>
             <a:pPr lvl="3"/>
             <a:r>
-              <a:rPr lang="en-US" smtClean="0"/>
+              <a:rPr lang="en-US"/>
               <a:t>Fourth level</a:t>
             </a:r>
           </a:p>
           <a:p>
             <a:pPr lvl="4"/>
             <a:r>
-              <a:rPr lang="en-US" smtClean="0"/>
+              <a:rPr lang="en-US"/>
               <a:t>Fifth level</a:t>
             </a:r>
             <a:endParaRPr lang="sv-SE"/>
@@ -772,7 +772,7 @@
           <a:p>
             <a:fld id="{98555210-FA09-4373-AFCC-33C76A1B3FFC}" type="datetimeFigureOut">
               <a:rPr lang="sv-SE" smtClean="0"/>
-              <a:t>2026-02-06</a:t>
+              <a:t>2026-03-05</a:t>
             </a:fld>
             <a:endParaRPr lang="sv-SE"/>
           </a:p>
@@ -875,7 +875,7 @@
           </a:lstStyle>
           <a:p>
             <a:r>
-              <a:rPr lang="en-US" smtClean="0"/>
+              <a:rPr lang="en-US"/>
               <a:t>Click to edit Master title style</a:t>
             </a:r>
             <a:endParaRPr lang="sv-SE"/>
@@ -995,7 +995,7 @@
           <a:p>
             <a:pPr lvl="0"/>
             <a:r>
-              <a:rPr lang="en-US" smtClean="0"/>
+              <a:rPr lang="en-US"/>
               <a:t>Edit Master text styles</a:t>
             </a:r>
           </a:p>
@@ -1018,7 +1018,7 @@
           <a:p>
             <a:fld id="{98555210-FA09-4373-AFCC-33C76A1B3FFC}" type="datetimeFigureOut">
               <a:rPr lang="sv-SE" smtClean="0"/>
-              <a:t>2026-02-06</a:t>
+              <a:t>2026-03-05</a:t>
             </a:fld>
             <a:endParaRPr lang="sv-SE"/>
           </a:p>
@@ -1112,7 +1112,7 @@
           <a:lstStyle/>
           <a:p>
             <a:r>
-              <a:rPr lang="en-US" smtClean="0"/>
+              <a:rPr lang="en-US"/>
               <a:t>Click to edit Master title style</a:t>
             </a:r>
             <a:endParaRPr lang="sv-SE"/>
@@ -1141,35 +1141,35 @@
           <a:p>
             <a:pPr lvl="0"/>
             <a:r>
-              <a:rPr lang="en-US" smtClean="0"/>
+              <a:rPr lang="en-US"/>
               <a:t>Edit Master text styles</a:t>
             </a:r>
           </a:p>
           <a:p>
             <a:pPr lvl="1"/>
             <a:r>
-              <a:rPr lang="en-US" smtClean="0"/>
+              <a:rPr lang="en-US"/>
               <a:t>Second level</a:t>
             </a:r>
           </a:p>
           <a:p>
             <a:pPr lvl="2"/>
             <a:r>
-              <a:rPr lang="en-US" smtClean="0"/>
+              <a:rPr lang="en-US"/>
               <a:t>Third level</a:t>
             </a:r>
           </a:p>
           <a:p>
             <a:pPr lvl="3"/>
             <a:r>
-              <a:rPr lang="en-US" smtClean="0"/>
+              <a:rPr lang="en-US"/>
               <a:t>Fourth level</a:t>
             </a:r>
           </a:p>
           <a:p>
             <a:pPr lvl="4"/>
             <a:r>
-              <a:rPr lang="en-US" smtClean="0"/>
+              <a:rPr lang="en-US"/>
               <a:t>Fifth level</a:t>
             </a:r>
             <a:endParaRPr lang="sv-SE"/>
@@ -1198,35 +1198,35 @@
           <a:p>
             <a:pPr lvl="0"/>
             <a:r>
-              <a:rPr lang="en-US" smtClean="0"/>
+              <a:rPr lang="en-US"/>
               <a:t>Edit Master text styles</a:t>
             </a:r>
           </a:p>
           <a:p>
             <a:pPr lvl="1"/>
             <a:r>
-              <a:rPr lang="en-US" smtClean="0"/>
+              <a:rPr lang="en-US"/>
               <a:t>Second level</a:t>
             </a:r>
           </a:p>
           <a:p>
             <a:pPr lvl="2"/>
             <a:r>
-              <a:rPr lang="en-US" smtClean="0"/>
+              <a:rPr lang="en-US"/>
               <a:t>Third level</a:t>
             </a:r>
           </a:p>
           <a:p>
             <a:pPr lvl="3"/>
             <a:r>
-              <a:rPr lang="en-US" smtClean="0"/>
+              <a:rPr lang="en-US"/>
               <a:t>Fourth level</a:t>
             </a:r>
           </a:p>
           <a:p>
             <a:pPr lvl="4"/>
             <a:r>
-              <a:rPr lang="en-US" smtClean="0"/>
+              <a:rPr lang="en-US"/>
               <a:t>Fifth level</a:t>
             </a:r>
             <a:endParaRPr lang="sv-SE"/>
@@ -1250,7 +1250,7 @@
           <a:p>
             <a:fld id="{98555210-FA09-4373-AFCC-33C76A1B3FFC}" type="datetimeFigureOut">
               <a:rPr lang="sv-SE" smtClean="0"/>
-              <a:t>2026-02-06</a:t>
+              <a:t>2026-03-05</a:t>
             </a:fld>
             <a:endParaRPr lang="sv-SE"/>
           </a:p>
@@ -1349,7 +1349,7 @@
           <a:lstStyle/>
           <a:p>
             <a:r>
-              <a:rPr lang="en-US" smtClean="0"/>
+              <a:rPr lang="en-US"/>
               <a:t>Click to edit Master title style</a:t>
             </a:r>
             <a:endParaRPr lang="sv-SE"/>
@@ -1415,7 +1415,7 @@
           <a:p>
             <a:pPr lvl="0"/>
             <a:r>
-              <a:rPr lang="en-US" smtClean="0"/>
+              <a:rPr lang="en-US"/>
               <a:t>Edit Master text styles</a:t>
             </a:r>
           </a:p>
@@ -1443,35 +1443,35 @@
           <a:p>
             <a:pPr lvl="0"/>
             <a:r>
-              <a:rPr lang="en-US" smtClean="0"/>
+              <a:rPr lang="en-US"/>
               <a:t>Edit Master text styles</a:t>
             </a:r>
           </a:p>
           <a:p>
             <a:pPr lvl="1"/>
             <a:r>
-              <a:rPr lang="en-US" smtClean="0"/>
+              <a:rPr lang="en-US"/>
               <a:t>Second level</a:t>
             </a:r>
           </a:p>
           <a:p>
             <a:pPr lvl="2"/>
             <a:r>
-              <a:rPr lang="en-US" smtClean="0"/>
+              <a:rPr lang="en-US"/>
               <a:t>Third level</a:t>
             </a:r>
           </a:p>
           <a:p>
             <a:pPr lvl="3"/>
             <a:r>
-              <a:rPr lang="en-US" smtClean="0"/>
+              <a:rPr lang="en-US"/>
               <a:t>Fourth level</a:t>
             </a:r>
           </a:p>
           <a:p>
             <a:pPr lvl="4"/>
             <a:r>
-              <a:rPr lang="en-US" smtClean="0"/>
+              <a:rPr lang="en-US"/>
               <a:t>Fifth level</a:t>
             </a:r>
             <a:endParaRPr lang="sv-SE"/>
@@ -1537,7 +1537,7 @@
           <a:p>
             <a:pPr lvl="0"/>
             <a:r>
-              <a:rPr lang="en-US" smtClean="0"/>
+              <a:rPr lang="en-US"/>
               <a:t>Edit Master text styles</a:t>
             </a:r>
           </a:p>
@@ -1565,35 +1565,35 @@
           <a:p>
             <a:pPr lvl="0"/>
             <a:r>
-              <a:rPr lang="en-US" smtClean="0"/>
+              <a:rPr lang="en-US"/>
               <a:t>Edit Master text styles</a:t>
             </a:r>
           </a:p>
           <a:p>
             <a:pPr lvl="1"/>
             <a:r>
-              <a:rPr lang="en-US" smtClean="0"/>
+              <a:rPr lang="en-US"/>
               <a:t>Second level</a:t>
             </a:r>
           </a:p>
           <a:p>
             <a:pPr lvl="2"/>
             <a:r>
-              <a:rPr lang="en-US" smtClean="0"/>
+              <a:rPr lang="en-US"/>
               <a:t>Third level</a:t>
             </a:r>
           </a:p>
           <a:p>
             <a:pPr lvl="3"/>
             <a:r>
-              <a:rPr lang="en-US" smtClean="0"/>
+              <a:rPr lang="en-US"/>
               <a:t>Fourth level</a:t>
             </a:r>
           </a:p>
           <a:p>
             <a:pPr lvl="4"/>
             <a:r>
-              <a:rPr lang="en-US" smtClean="0"/>
+              <a:rPr lang="en-US"/>
               <a:t>Fifth level</a:t>
             </a:r>
             <a:endParaRPr lang="sv-SE"/>
@@ -1617,7 +1617,7 @@
           <a:p>
             <a:fld id="{98555210-FA09-4373-AFCC-33C76A1B3FFC}" type="datetimeFigureOut">
               <a:rPr lang="sv-SE" smtClean="0"/>
-              <a:t>2026-02-06</a:t>
+              <a:t>2026-03-05</a:t>
             </a:fld>
             <a:endParaRPr lang="sv-SE"/>
           </a:p>
@@ -1711,7 +1711,7 @@
           <a:lstStyle/>
           <a:p>
             <a:r>
-              <a:rPr lang="en-US" smtClean="0"/>
+              <a:rPr lang="en-US"/>
               <a:t>Click to edit Master title style</a:t>
             </a:r>
             <a:endParaRPr lang="sv-SE"/>
@@ -1735,7 +1735,7 @@
           <a:p>
             <a:fld id="{98555210-FA09-4373-AFCC-33C76A1B3FFC}" type="datetimeFigureOut">
               <a:rPr lang="sv-SE" smtClean="0"/>
-              <a:t>2026-02-06</a:t>
+              <a:t>2026-03-05</a:t>
             </a:fld>
             <a:endParaRPr lang="sv-SE"/>
           </a:p>
@@ -1830,7 +1830,7 @@
           <a:p>
             <a:fld id="{98555210-FA09-4373-AFCC-33C76A1B3FFC}" type="datetimeFigureOut">
               <a:rPr lang="sv-SE" smtClean="0"/>
-              <a:t>2026-02-06</a:t>
+              <a:t>2026-03-05</a:t>
             </a:fld>
             <a:endParaRPr lang="sv-SE"/>
           </a:p>
@@ -1933,7 +1933,7 @@
           </a:lstStyle>
           <a:p>
             <a:r>
-              <a:rPr lang="en-US" smtClean="0"/>
+              <a:rPr lang="en-US"/>
               <a:t>Click to edit Master title style</a:t>
             </a:r>
             <a:endParaRPr lang="sv-SE"/>
@@ -1990,35 +1990,35 @@
           <a:p>
             <a:pPr lvl="0"/>
             <a:r>
-              <a:rPr lang="en-US" smtClean="0"/>
+              <a:rPr lang="en-US"/>
               <a:t>Edit Master text styles</a:t>
             </a:r>
           </a:p>
           <a:p>
             <a:pPr lvl="1"/>
             <a:r>
-              <a:rPr lang="en-US" smtClean="0"/>
+              <a:rPr lang="en-US"/>
               <a:t>Second level</a:t>
             </a:r>
           </a:p>
           <a:p>
             <a:pPr lvl="2"/>
             <a:r>
-              <a:rPr lang="en-US" smtClean="0"/>
+              <a:rPr lang="en-US"/>
               <a:t>Third level</a:t>
             </a:r>
           </a:p>
           <a:p>
             <a:pPr lvl="3"/>
             <a:r>
-              <a:rPr lang="en-US" smtClean="0"/>
+              <a:rPr lang="en-US"/>
               <a:t>Fourth level</a:t>
             </a:r>
           </a:p>
           <a:p>
             <a:pPr lvl="4"/>
             <a:r>
-              <a:rPr lang="en-US" smtClean="0"/>
+              <a:rPr lang="en-US"/>
               <a:t>Fifth level</a:t>
             </a:r>
             <a:endParaRPr lang="sv-SE"/>
@@ -2084,7 +2084,7 @@
           <a:p>
             <a:pPr lvl="0"/>
             <a:r>
-              <a:rPr lang="en-US" smtClean="0"/>
+              <a:rPr lang="en-US"/>
               <a:t>Edit Master text styles</a:t>
             </a:r>
           </a:p>
@@ -2107,7 +2107,7 @@
           <a:p>
             <a:fld id="{98555210-FA09-4373-AFCC-33C76A1B3FFC}" type="datetimeFigureOut">
               <a:rPr lang="sv-SE" smtClean="0"/>
-              <a:t>2026-02-06</a:t>
+              <a:t>2026-03-05</a:t>
             </a:fld>
             <a:endParaRPr lang="sv-SE"/>
           </a:p>
@@ -2210,7 +2210,7 @@
           </a:lstStyle>
           <a:p>
             <a:r>
-              <a:rPr lang="en-US" smtClean="0"/>
+              <a:rPr lang="en-US"/>
               <a:t>Click to edit Master title style</a:t>
             </a:r>
             <a:endParaRPr lang="sv-SE"/>
@@ -2337,7 +2337,7 @@
           <a:p>
             <a:pPr lvl="0"/>
             <a:r>
-              <a:rPr lang="en-US" smtClean="0"/>
+              <a:rPr lang="en-US"/>
               <a:t>Edit Master text styles</a:t>
             </a:r>
           </a:p>
@@ -2360,7 +2360,7 @@
           <a:p>
             <a:fld id="{98555210-FA09-4373-AFCC-33C76A1B3FFC}" type="datetimeFigureOut">
               <a:rPr lang="sv-SE" smtClean="0"/>
-              <a:t>2026-02-06</a:t>
+              <a:t>2026-03-05</a:t>
             </a:fld>
             <a:endParaRPr lang="sv-SE"/>
           </a:p>
@@ -2469,7 +2469,7 @@
           <a:lstStyle/>
           <a:p>
             <a:r>
-              <a:rPr lang="en-US" smtClean="0"/>
+              <a:rPr lang="en-US"/>
               <a:t>Click to edit Master title style</a:t>
             </a:r>
             <a:endParaRPr lang="sv-SE"/>
@@ -2503,35 +2503,35 @@
           <a:p>
             <a:pPr lvl="0"/>
             <a:r>
-              <a:rPr lang="en-US" smtClean="0"/>
+              <a:rPr lang="en-US"/>
               <a:t>Edit Master text styles</a:t>
             </a:r>
           </a:p>
           <a:p>
             <a:pPr lvl="1"/>
             <a:r>
-              <a:rPr lang="en-US" smtClean="0"/>
+              <a:rPr lang="en-US"/>
               <a:t>Second level</a:t>
             </a:r>
           </a:p>
           <a:p>
             <a:pPr lvl="2"/>
             <a:r>
-              <a:rPr lang="en-US" smtClean="0"/>
+              <a:rPr lang="en-US"/>
               <a:t>Third level</a:t>
             </a:r>
           </a:p>
           <a:p>
             <a:pPr lvl="3"/>
             <a:r>
-              <a:rPr lang="en-US" smtClean="0"/>
+              <a:rPr lang="en-US"/>
               <a:t>Fourth level</a:t>
             </a:r>
           </a:p>
           <a:p>
             <a:pPr lvl="4"/>
             <a:r>
-              <a:rPr lang="en-US" smtClean="0"/>
+              <a:rPr lang="en-US"/>
               <a:t>Fifth level</a:t>
             </a:r>
             <a:endParaRPr lang="sv-SE"/>
@@ -2573,7 +2573,7 @@
           <a:p>
             <a:fld id="{98555210-FA09-4373-AFCC-33C76A1B3FFC}" type="datetimeFigureOut">
               <a:rPr lang="sv-SE" smtClean="0"/>
-              <a:t>2026-02-06</a:t>
+              <a:t>2026-03-05</a:t>
             </a:fld>
             <a:endParaRPr lang="sv-SE"/>
           </a:p>
@@ -2994,19 +2994,19 @@
           <a:lstStyle/>
           <a:p>
             <a:r>
-              <a:rPr lang="sv-SE" b="1" dirty="0" smtClean="0"/>
+              <a:rPr lang="sv-SE" b="1" dirty="0"/>
               <a:t>The </a:t>
             </a:r>
             <a:r>
-              <a:rPr lang="sv-SE" b="1" dirty="0" err="1" smtClean="0"/>
+              <a:rPr lang="sv-SE" b="1" dirty="0" err="1"/>
               <a:t>Traditional</a:t>
             </a:r>
             <a:r>
-              <a:rPr lang="sv-SE" b="1" dirty="0" smtClean="0"/>
+              <a:rPr lang="sv-SE" b="1" dirty="0"/>
               <a:t> EV </a:t>
             </a:r>
             <a:r>
-              <a:rPr lang="sv-SE" b="1" dirty="0" err="1" smtClean="0"/>
+              <a:rPr lang="sv-SE" b="1" dirty="0" err="1"/>
               <a:t>Architecture</a:t>
             </a:r>
             <a:endParaRPr lang="sv-SE" b="1" dirty="0"/>
@@ -3039,15 +3039,15 @@
               <a:buNone/>
             </a:pPr>
             <a:r>
-              <a:rPr lang="en-US" dirty="0" smtClean="0"/>
+              <a:rPr lang="en-US" dirty="0"/>
               <a:t>Modern electric vehicles rely on a </a:t>
             </a:r>
             <a:r>
-              <a:rPr lang="en-US" b="1" dirty="0" smtClean="0"/>
+              <a:rPr lang="en-US" b="1" dirty="0"/>
               <a:t>high-power traction inverter</a:t>
             </a:r>
             <a:r>
-              <a:rPr lang="en-US" dirty="0" smtClean="0"/>
+              <a:rPr lang="en-US" dirty="0"/>
               <a:t>—often hundreds of kilowatts—to drive the electric machine.</a:t>
             </a:r>
           </a:p>
@@ -3055,73 +3055,69 @@
             <a:pPr marL="0" indent="0">
               <a:buNone/>
             </a:pPr>
-            <a:r>
-              <a:rPr lang="en-US" dirty="0" smtClean="0"/>
-              <a:t/>
-            </a:r>
             <a:br>
-              <a:rPr lang="en-US" dirty="0" smtClean="0"/>
+              <a:rPr lang="en-US" dirty="0"/>
             </a:br>
             <a:r>
-              <a:rPr lang="en-US" dirty="0" smtClean="0"/>
+              <a:rPr lang="en-US" dirty="0"/>
               <a:t>Alongside this inverter, however, a </a:t>
             </a:r>
             <a:r>
-              <a:rPr lang="en-US" b="1" dirty="0" smtClean="0"/>
+              <a:rPr lang="en-US" b="1" dirty="0"/>
               <a:t>separate auxiliary power supply</a:t>
             </a:r>
             <a:r>
-              <a:rPr lang="en-US" dirty="0" smtClean="0"/>
+              <a:rPr lang="en-US" dirty="0"/>
               <a:t> is almost always present:</a:t>
             </a:r>
           </a:p>
           <a:p>
             <a:pPr lvl="1"/>
             <a:r>
-              <a:rPr lang="en-US" dirty="0" smtClean="0"/>
+              <a:rPr lang="en-US" dirty="0"/>
               <a:t>HV → LV DC/DC converters (for 12 V / 24 V buses)</a:t>
             </a:r>
           </a:p>
           <a:p>
             <a:pPr lvl="1"/>
             <a:r>
-              <a:rPr lang="en-US" dirty="0" smtClean="0"/>
+              <a:rPr lang="en-US" dirty="0"/>
               <a:t>Dedicated auxiliary inverters or converters</a:t>
             </a:r>
           </a:p>
           <a:p>
             <a:pPr lvl="1"/>
             <a:r>
-              <a:rPr lang="en-US" dirty="0" smtClean="0"/>
+              <a:rPr lang="en-US" dirty="0"/>
               <a:t>Extra semiconductors, magnetics, cooling, isolation, and protection</a:t>
             </a:r>
           </a:p>
           <a:p>
             <a:pPr lvl="1"/>
-            <a:endParaRPr lang="en-US" dirty="0" smtClean="0"/>
+            <a:endParaRPr lang="en-US" dirty="0"/>
           </a:p>
           <a:p>
             <a:pPr marL="0" indent="0">
               <a:buNone/>
             </a:pPr>
             <a:r>
-              <a:rPr lang="en-US" dirty="0" smtClean="0"/>
+              <a:rPr lang="en-US" dirty="0"/>
               <a:t>Although the </a:t>
             </a:r>
             <a:r>
-              <a:rPr lang="en-US" b="1" dirty="0" smtClean="0"/>
+              <a:rPr lang="en-US" b="1" dirty="0"/>
               <a:t>auxiliary power demand is tiny</a:t>
             </a:r>
             <a:r>
-              <a:rPr lang="en-US" dirty="0" smtClean="0"/>
+              <a:rPr lang="en-US" dirty="0"/>
               <a:t> (typically several kilowatts), it is served by a </a:t>
             </a:r>
             <a:r>
-              <a:rPr lang="en-US" b="1" dirty="0" smtClean="0"/>
+              <a:rPr lang="en-US" b="1" dirty="0"/>
               <a:t>fully independent power module</a:t>
             </a:r>
             <a:r>
-              <a:rPr lang="en-US" dirty="0" smtClean="0"/>
+              <a:rPr lang="en-US" dirty="0"/>
               <a:t>, designed, qualified, and cooled as if it were a major energy path.</a:t>
             </a:r>
           </a:p>
@@ -3129,22 +3125,22 @@
             <a:pPr marL="0" indent="0">
               <a:buNone/>
             </a:pPr>
-            <a:endParaRPr lang="en-US" dirty="0" smtClean="0"/>
+            <a:endParaRPr lang="en-US" dirty="0"/>
           </a:p>
           <a:p>
             <a:pPr marL="0" indent="0">
               <a:buNone/>
             </a:pPr>
             <a:r>
-              <a:rPr lang="en-US" dirty="0" smtClean="0"/>
+              <a:rPr lang="en-US" dirty="0"/>
               <a:t>This creates a </a:t>
             </a:r>
             <a:r>
-              <a:rPr lang="en-US" b="1" dirty="0" smtClean="0"/>
+              <a:rPr lang="en-US" b="1" dirty="0"/>
               <a:t>structural inefficiency</a:t>
             </a:r>
             <a:r>
-              <a:rPr lang="en-US" dirty="0" smtClean="0"/>
+              <a:rPr lang="en-US" dirty="0"/>
               <a:t>:</a:t>
             </a:r>
           </a:p>
@@ -3259,7 +3255,7 @@
           <a:lstStyle/>
           <a:p>
             <a:r>
-              <a:rPr lang="en-US" b="1" dirty="0" smtClean="0"/>
+              <a:rPr lang="en-US" b="1" dirty="0"/>
               <a:t>The Overlooked Resource: Harmonic Energy in the Traction Inverter</a:t>
             </a:r>
             <a:endParaRPr lang="sv-SE" b="1" dirty="0"/>
@@ -3287,28 +3283,28 @@
               <a:buNone/>
             </a:pPr>
             <a:r>
-              <a:rPr lang="en-US" dirty="0" smtClean="0"/>
+              <a:rPr lang="en-US" dirty="0"/>
               <a:t>The traction inverter already:</a:t>
             </a:r>
           </a:p>
           <a:p>
             <a:pPr lvl="1"/>
             <a:r>
-              <a:rPr lang="en-US" dirty="0" smtClean="0"/>
+              <a:rPr lang="en-US" dirty="0"/>
               <a:t>Switches at high frequency</a:t>
             </a:r>
           </a:p>
           <a:p>
             <a:pPr lvl="1"/>
             <a:r>
-              <a:rPr lang="en-US" dirty="0" smtClean="0"/>
+              <a:rPr lang="en-US" dirty="0"/>
               <a:t>Generates rich spectral content around the switching frequency</a:t>
             </a:r>
           </a:p>
           <a:p>
             <a:pPr lvl="1"/>
             <a:r>
-              <a:rPr lang="en-US" dirty="0" smtClean="0"/>
+              <a:rPr lang="en-US" dirty="0"/>
               <a:t>Handles voltages and currents far beyond auxiliary needs</a:t>
             </a:r>
           </a:p>
@@ -3317,36 +3313,36 @@
               <a:buNone/>
             </a:pPr>
             <a:r>
-              <a:rPr lang="en-US" dirty="0" smtClean="0"/>
+              <a:rPr lang="en-US" dirty="0"/>
               <a:t>Traditionally, </a:t>
             </a:r>
             <a:r>
-              <a:rPr lang="en-US" b="1" dirty="0" smtClean="0"/>
+              <a:rPr lang="en-US" b="1" dirty="0"/>
               <a:t>harmonics are treated as a problem</a:t>
             </a:r>
             <a:r>
-              <a:rPr lang="en-US" dirty="0" smtClean="0"/>
+              <a:rPr lang="en-US" dirty="0"/>
               <a:t>:</a:t>
             </a:r>
           </a:p>
           <a:p>
             <a:pPr lvl="1"/>
             <a:r>
-              <a:rPr lang="en-US" dirty="0" smtClean="0"/>
+              <a:rPr lang="en-US" dirty="0"/>
               <a:t>Filtered</a:t>
             </a:r>
           </a:p>
           <a:p>
             <a:pPr lvl="1"/>
             <a:r>
-              <a:rPr lang="en-US" dirty="0" smtClean="0"/>
+              <a:rPr lang="en-US" dirty="0"/>
               <a:t>Suppressed</a:t>
             </a:r>
           </a:p>
           <a:p>
             <a:pPr lvl="1"/>
             <a:r>
-              <a:rPr lang="en-US" dirty="0" smtClean="0"/>
+              <a:rPr lang="en-US" dirty="0"/>
               <a:t>Minimized</a:t>
             </a:r>
           </a:p>
@@ -3355,15 +3351,15 @@
               <a:buNone/>
             </a:pPr>
             <a:r>
-              <a:rPr lang="en-US" dirty="0" smtClean="0"/>
+              <a:rPr lang="en-US" dirty="0"/>
               <a:t>But fundamentally, these harmonics are </a:t>
             </a:r>
             <a:r>
-              <a:rPr lang="en-US" b="1" dirty="0" smtClean="0"/>
+              <a:rPr lang="en-US" b="1" dirty="0"/>
               <a:t>real electrical energy</a:t>
             </a:r>
             <a:r>
-              <a:rPr lang="en-US" dirty="0" smtClean="0"/>
+              <a:rPr lang="en-US" dirty="0"/>
               <a:t>, generated continuously during normal operation.</a:t>
             </a:r>
           </a:p>
@@ -3418,7 +3414,7 @@
           <a:lstStyle/>
           <a:p>
             <a:r>
-              <a:rPr lang="en-US" dirty="0" smtClean="0"/>
+              <a:rPr lang="en-US" dirty="0"/>
               <a:t>Open-End Winding: Enabling Control</a:t>
             </a:r>
             <a:endParaRPr lang="sv-SE" dirty="0"/>
@@ -3476,30 +3472,30 @@
           <a:lstStyle/>
           <a:p>
             <a:r>
-              <a:rPr lang="en-US" dirty="0" smtClean="0"/>
+              <a:rPr lang="en-US" dirty="0"/>
               <a:t>The open-end winding (OEW) machine topology introduces </a:t>
             </a:r>
             <a:r>
-              <a:rPr lang="en-US" b="1" dirty="0" smtClean="0"/>
+              <a:rPr lang="en-US" b="1" dirty="0"/>
               <a:t>two independent inverter terminals per phase</a:t>
             </a:r>
             <a:r>
-              <a:rPr lang="en-US" dirty="0" smtClean="0"/>
+              <a:rPr lang="en-US" dirty="0"/>
               <a:t>.</a:t>
             </a:r>
             <a:br>
-              <a:rPr lang="en-US" dirty="0" smtClean="0"/>
+              <a:rPr lang="en-US" dirty="0"/>
             </a:br>
             <a:r>
-              <a:rPr lang="en-US" dirty="0" smtClean="0"/>
+              <a:rPr lang="en-US" dirty="0"/>
               <a:t>This does not just double hardware—it </a:t>
             </a:r>
             <a:r>
-              <a:rPr lang="en-US" b="1" dirty="0" smtClean="0"/>
+              <a:rPr lang="en-US" b="1" dirty="0"/>
               <a:t>introduces modulation redundancy</a:t>
             </a:r>
             <a:r>
-              <a:rPr lang="en-US" dirty="0" smtClean="0"/>
+              <a:rPr lang="en-US" dirty="0"/>
               <a:t>.</a:t>
             </a:r>
             <a:endParaRPr lang="sv-SE" dirty="0"/>
@@ -3530,36 +3526,36 @@
               <a:lstStyle/>
               <a:p>
                 <a:r>
-                  <a:rPr lang="sv-SE" dirty="0" smtClean="0"/>
+                  <a:rPr lang="sv-SE" dirty="0"/>
                   <a:t>For a given </a:t>
                 </a:r>
                 <a:r>
-                  <a:rPr lang="sv-SE" dirty="0" err="1" smtClean="0"/>
+                  <a:rPr lang="sv-SE" dirty="0" err="1"/>
                   <a:t>phase</a:t>
                 </a:r>
                 <a:r>
-                  <a:rPr lang="sv-SE" dirty="0" smtClean="0"/>
+                  <a:rPr lang="sv-SE" dirty="0"/>
                   <a:t> (</a:t>
                 </a:r>
                 <a:r>
-                  <a:rPr lang="sv-SE" dirty="0" err="1" smtClean="0"/>
+                  <a:rPr lang="sv-SE" dirty="0" err="1"/>
                   <a:t>e.g</a:t>
                 </a:r>
                 <a:r>
-                  <a:rPr lang="sv-SE" dirty="0" smtClean="0"/>
+                  <a:rPr lang="sv-SE" dirty="0"/>
                   <a:t>., </a:t>
                 </a:r>
                 <a:r>
-                  <a:rPr lang="sv-SE" dirty="0" err="1" smtClean="0"/>
+                  <a:rPr lang="sv-SE" dirty="0" err="1"/>
                   <a:t>phase</a:t>
                 </a:r>
                 <a:r>
-                  <a:rPr lang="sv-SE" dirty="0" smtClean="0"/>
+                  <a:rPr lang="sv-SE" dirty="0"/>
                   <a:t> A):</a:t>
                 </a:r>
               </a:p>
               <a:p>
-                <a:endParaRPr lang="sv-SE" dirty="0" smtClean="0"/>
+                <a:endParaRPr lang="sv-SE" dirty="0"/>
               </a:p>
               <a:p>
                 <a:pPr/>
@@ -3718,42 +3714,42 @@
                     </m:oMath>
                   </m:oMathPara>
                 </a14:m>
-                <a:endParaRPr lang="sv-SE" dirty="0" smtClean="0"/>
+                <a:endParaRPr lang="sv-SE" dirty="0"/>
               </a:p>
               <a:p>
-                <a:endParaRPr lang="sv-SE" dirty="0" smtClean="0"/>
+                <a:endParaRPr lang="sv-SE" dirty="0"/>
               </a:p>
               <a:p>
                 <a:r>
-                  <a:rPr lang="sv-SE" dirty="0" err="1" smtClean="0"/>
+                  <a:rPr lang="sv-SE" dirty="0" err="1"/>
                   <a:t>This</a:t>
                 </a:r>
                 <a:r>
-                  <a:rPr lang="sv-SE" dirty="0" smtClean="0"/>
+                  <a:rPr lang="sv-SE" dirty="0"/>
                   <a:t> </a:t>
                 </a:r>
                 <a:r>
-                  <a:rPr lang="sv-SE" dirty="0" err="1" smtClean="0"/>
+                  <a:rPr lang="sv-SE" dirty="0" err="1"/>
                   <a:t>voltage</a:t>
                 </a:r>
                 <a:r>
-                  <a:rPr lang="sv-SE" dirty="0" smtClean="0"/>
+                  <a:rPr lang="sv-SE" dirty="0"/>
                   <a:t> </a:t>
                 </a:r>
                 <a:r>
-                  <a:rPr lang="sv-SE" dirty="0" err="1" smtClean="0"/>
+                  <a:rPr lang="sv-SE" dirty="0" err="1"/>
                   <a:t>naturally</a:t>
                 </a:r>
                 <a:r>
-                  <a:rPr lang="sv-SE" dirty="0" smtClean="0"/>
+                  <a:rPr lang="sv-SE" dirty="0"/>
                   <a:t> </a:t>
                 </a:r>
                 <a:r>
-                  <a:rPr lang="sv-SE" dirty="0" err="1" smtClean="0"/>
+                  <a:rPr lang="sv-SE" dirty="0" err="1"/>
                   <a:t>contains</a:t>
                 </a:r>
                 <a:r>
-                  <a:rPr lang="sv-SE" dirty="0" smtClean="0"/>
+                  <a:rPr lang="sv-SE" dirty="0"/>
                   <a:t>:</a:t>
                 </a:r>
               </a:p>
@@ -3763,34 +3759,34 @@
                   <a:buChar char="•"/>
                 </a:pPr>
                 <a:r>
-                  <a:rPr lang="sv-SE" dirty="0" smtClean="0"/>
+                  <a:rPr lang="sv-SE" dirty="0"/>
                   <a:t>A </a:t>
                 </a:r>
                 <a:r>
-                  <a:rPr lang="sv-SE" b="1" dirty="0" smtClean="0"/>
+                  <a:rPr lang="sv-SE" b="1" dirty="0"/>
                   <a:t>fundamental </a:t>
                 </a:r>
                 <a:r>
-                  <a:rPr lang="sv-SE" b="1" dirty="0" err="1" smtClean="0"/>
+                  <a:rPr lang="sv-SE" b="1" dirty="0" err="1"/>
                   <a:t>component</a:t>
                 </a:r>
                 <a:r>
-                  <a:rPr lang="sv-SE" dirty="0" smtClean="0"/>
+                  <a:rPr lang="sv-SE" dirty="0"/>
                   <a:t> → </a:t>
                 </a:r>
                 <a:r>
-                  <a:rPr lang="sv-SE" dirty="0" err="1" smtClean="0"/>
+                  <a:rPr lang="sv-SE" dirty="0" err="1"/>
                   <a:t>torque</a:t>
                 </a:r>
                 <a:r>
-                  <a:rPr lang="sv-SE" dirty="0" smtClean="0"/>
+                  <a:rPr lang="sv-SE" dirty="0"/>
                   <a:t> </a:t>
                 </a:r>
                 <a:r>
-                  <a:rPr lang="sv-SE" dirty="0" err="1" smtClean="0"/>
+                  <a:rPr lang="sv-SE" dirty="0" err="1"/>
                   <a:t>production</a:t>
                 </a:r>
-                <a:endParaRPr lang="sv-SE" dirty="0" smtClean="0"/>
+                <a:endParaRPr lang="sv-SE" dirty="0"/>
               </a:p>
               <a:p>
                 <a:pPr lvl="1">
@@ -3798,98 +3794,98 @@
                   <a:buChar char="•"/>
                 </a:pPr>
                 <a:r>
-                  <a:rPr lang="sv-SE" dirty="0" smtClean="0"/>
+                  <a:rPr lang="sv-SE" dirty="0"/>
                   <a:t>A </a:t>
                 </a:r>
                 <a:r>
-                  <a:rPr lang="sv-SE" b="1" dirty="0" err="1" smtClean="0"/>
+                  <a:rPr lang="sv-SE" b="1" dirty="0" err="1"/>
                   <a:t>harmonic</a:t>
                 </a:r>
                 <a:r>
-                  <a:rPr lang="sv-SE" b="1" dirty="0" smtClean="0"/>
+                  <a:rPr lang="sv-SE" b="1" dirty="0"/>
                   <a:t> </a:t>
                 </a:r>
                 <a:r>
-                  <a:rPr lang="sv-SE" b="1" dirty="0" err="1" smtClean="0"/>
+                  <a:rPr lang="sv-SE" b="1" dirty="0" err="1"/>
                   <a:t>component</a:t>
                 </a:r>
                 <a:r>
-                  <a:rPr lang="sv-SE" dirty="0" smtClean="0"/>
+                  <a:rPr lang="sv-SE" dirty="0"/>
                   <a:t> → </a:t>
                 </a:r>
                 <a:r>
-                  <a:rPr lang="sv-SE" dirty="0" err="1" smtClean="0"/>
+                  <a:rPr lang="sv-SE" dirty="0" err="1"/>
                   <a:t>normally</a:t>
                 </a:r>
                 <a:r>
-                  <a:rPr lang="sv-SE" dirty="0" smtClean="0"/>
+                  <a:rPr lang="sv-SE" dirty="0"/>
                   <a:t> </a:t>
                 </a:r>
                 <a:r>
-                  <a:rPr lang="sv-SE" dirty="0" err="1" smtClean="0"/>
+                  <a:rPr lang="sv-SE" dirty="0" err="1"/>
                   <a:t>unused</a:t>
                 </a:r>
-                <a:endParaRPr lang="sv-SE" dirty="0" smtClean="0"/>
+                <a:endParaRPr lang="sv-SE" dirty="0"/>
               </a:p>
               <a:p>
                 <a:r>
-                  <a:rPr lang="sv-SE" dirty="0" err="1" smtClean="0"/>
+                  <a:rPr lang="sv-SE" dirty="0" err="1"/>
                   <a:t>Crucially</a:t>
                 </a:r>
                 <a:r>
-                  <a:rPr lang="sv-SE" dirty="0" smtClean="0"/>
+                  <a:rPr lang="sv-SE" dirty="0"/>
                   <a:t>, OEW </a:t>
                 </a:r>
                 <a:r>
-                  <a:rPr lang="sv-SE" dirty="0" err="1" smtClean="0"/>
+                  <a:rPr lang="sv-SE" dirty="0" err="1"/>
                   <a:t>allows</a:t>
                 </a:r>
                 <a:r>
-                  <a:rPr lang="sv-SE" dirty="0" smtClean="0"/>
+                  <a:rPr lang="sv-SE" dirty="0"/>
                   <a:t> </a:t>
                 </a:r>
                 <a:r>
-                  <a:rPr lang="sv-SE" b="1" dirty="0" smtClean="0"/>
+                  <a:rPr lang="sv-SE" b="1" dirty="0"/>
                   <a:t>independent </a:t>
                 </a:r>
                 <a:r>
-                  <a:rPr lang="sv-SE" b="1" dirty="0" err="1" smtClean="0"/>
+                  <a:rPr lang="sv-SE" b="1" dirty="0" err="1"/>
                   <a:t>shaping</a:t>
                 </a:r>
                 <a:r>
-                  <a:rPr lang="sv-SE" b="1" dirty="0" smtClean="0"/>
+                  <a:rPr lang="sv-SE" b="1" dirty="0"/>
                   <a:t> </a:t>
                 </a:r>
                 <a:r>
-                  <a:rPr lang="sv-SE" b="1" dirty="0" err="1" smtClean="0"/>
+                  <a:rPr lang="sv-SE" b="1" dirty="0" err="1"/>
                   <a:t>of</a:t>
                 </a:r>
                 <a:r>
-                  <a:rPr lang="sv-SE" b="1" dirty="0" smtClean="0"/>
+                  <a:rPr lang="sv-SE" b="1" dirty="0"/>
                   <a:t> the </a:t>
                 </a:r>
                 <a:r>
-                  <a:rPr lang="sv-SE" b="1" dirty="0" err="1" smtClean="0"/>
+                  <a:rPr lang="sv-SE" b="1" dirty="0" err="1"/>
                   <a:t>switching</a:t>
                 </a:r>
                 <a:r>
-                  <a:rPr lang="sv-SE" b="1" dirty="0" smtClean="0"/>
+                  <a:rPr lang="sv-SE" b="1" dirty="0"/>
                   <a:t> </a:t>
                 </a:r>
                 <a:r>
-                  <a:rPr lang="sv-SE" b="1" dirty="0" err="1" smtClean="0"/>
+                  <a:rPr lang="sv-SE" b="1" dirty="0" err="1"/>
                   <a:t>component</a:t>
                 </a:r>
                 <a:r>
-                  <a:rPr lang="sv-SE" dirty="0" smtClean="0"/>
+                  <a:rPr lang="sv-SE" dirty="0"/>
                   <a:t>—for </a:t>
                 </a:r>
                 <a:r>
-                  <a:rPr lang="sv-SE" dirty="0" err="1" smtClean="0"/>
+                  <a:rPr lang="sv-SE" dirty="0" err="1"/>
                   <a:t>example</a:t>
                 </a:r>
                 <a:r>
-                  <a:rPr lang="sv-SE" dirty="0" smtClean="0"/>
+                  <a:rPr lang="sv-SE" dirty="0"/>
                   <a:t> by:</a:t>
                 </a:r>
               </a:p>
@@ -3899,46 +3895,46 @@
                   <a:buChar char="•"/>
                 </a:pPr>
                 <a:r>
-                  <a:rPr lang="sv-SE" dirty="0" smtClean="0"/>
+                  <a:rPr lang="sv-SE" dirty="0"/>
                   <a:t>Carrier </a:t>
                 </a:r>
                 <a:r>
-                  <a:rPr lang="sv-SE" dirty="0" err="1" smtClean="0"/>
+                  <a:rPr lang="sv-SE" dirty="0" err="1"/>
                   <a:t>phase</a:t>
                 </a:r>
                 <a:r>
-                  <a:rPr lang="sv-SE" dirty="0" smtClean="0"/>
+                  <a:rPr lang="sv-SE" dirty="0"/>
                   <a:t> </a:t>
                 </a:r>
                 <a:r>
-                  <a:rPr lang="sv-SE" dirty="0" err="1" smtClean="0"/>
+                  <a:rPr lang="sv-SE" dirty="0" err="1"/>
                   <a:t>shifting</a:t>
                 </a:r>
                 <a:r>
-                  <a:rPr lang="sv-SE" dirty="0" smtClean="0"/>
+                  <a:rPr lang="sv-SE" dirty="0"/>
                   <a:t> </a:t>
                 </a:r>
                 <a:r>
-                  <a:rPr lang="sv-SE" dirty="0" err="1" smtClean="0"/>
+                  <a:rPr lang="sv-SE" dirty="0" err="1"/>
                   <a:t>between</a:t>
                 </a:r>
                 <a:r>
-                  <a:rPr lang="sv-SE" dirty="0" smtClean="0"/>
+                  <a:rPr lang="sv-SE" dirty="0"/>
                   <a:t> the </a:t>
                 </a:r>
                 <a:r>
-                  <a:rPr lang="sv-SE" dirty="0" err="1" smtClean="0"/>
+                  <a:rPr lang="sv-SE" dirty="0" err="1"/>
                   <a:t>two</a:t>
                 </a:r>
                 <a:r>
-                  <a:rPr lang="sv-SE" dirty="0" smtClean="0"/>
+                  <a:rPr lang="sv-SE" dirty="0"/>
                   <a:t> </a:t>
                 </a:r>
                 <a:r>
-                  <a:rPr lang="sv-SE" dirty="0" err="1" smtClean="0"/>
+                  <a:rPr lang="sv-SE" dirty="0" err="1"/>
                   <a:t>inverters</a:t>
                 </a:r>
-                <a:endParaRPr lang="sv-SE" dirty="0" smtClean="0"/>
+                <a:endParaRPr lang="sv-SE" dirty="0"/>
               </a:p>
               <a:p>
                 <a:pPr lvl="1">
@@ -3946,18 +3942,18 @@
                   <a:buChar char="•"/>
                 </a:pPr>
                 <a:r>
-                  <a:rPr lang="sv-SE" dirty="0" err="1" smtClean="0"/>
+                  <a:rPr lang="sv-SE" dirty="0" err="1"/>
                   <a:t>Asymmetric</a:t>
                 </a:r>
                 <a:r>
-                  <a:rPr lang="sv-SE" dirty="0" smtClean="0"/>
+                  <a:rPr lang="sv-SE" dirty="0"/>
                   <a:t> PWM </a:t>
                 </a:r>
                 <a:r>
-                  <a:rPr lang="sv-SE" dirty="0" err="1" smtClean="0"/>
+                  <a:rPr lang="sv-SE" dirty="0" err="1"/>
                   <a:t>sequencing</a:t>
                 </a:r>
-                <a:endParaRPr lang="sv-SE" dirty="0" smtClean="0"/>
+                <a:endParaRPr lang="sv-SE" dirty="0"/>
               </a:p>
               <a:p>
                 <a:pPr lvl="1">
@@ -3965,133 +3961,132 @@
                   <a:buChar char="•"/>
                 </a:pPr>
                 <a:r>
-                  <a:rPr lang="sv-SE" dirty="0" err="1" smtClean="0"/>
+                  <a:rPr lang="sv-SE" dirty="0" err="1"/>
                   <a:t>Controlled</a:t>
                 </a:r>
                 <a:r>
-                  <a:rPr lang="sv-SE" dirty="0" smtClean="0"/>
+                  <a:rPr lang="sv-SE" dirty="0"/>
                   <a:t> </a:t>
                 </a:r>
                 <a:r>
-                  <a:rPr lang="sv-SE" dirty="0" err="1" smtClean="0"/>
+                  <a:rPr lang="sv-SE" dirty="0" err="1"/>
                   <a:t>zero-sequence</a:t>
                 </a:r>
                 <a:r>
-                  <a:rPr lang="sv-SE" dirty="0" smtClean="0"/>
+                  <a:rPr lang="sv-SE" dirty="0"/>
                   <a:t> </a:t>
                 </a:r>
                 <a:r>
-                  <a:rPr lang="sv-SE" dirty="0" err="1" smtClean="0"/>
+                  <a:rPr lang="sv-SE" dirty="0" err="1"/>
                   <a:t>differences</a:t>
                 </a:r>
-                <a:endParaRPr lang="sv-SE" dirty="0" smtClean="0"/>
+                <a:endParaRPr lang="sv-SE" dirty="0"/>
               </a:p>
               <a:p>
                 <a:r>
-                  <a:rPr lang="sv-SE" dirty="0" smtClean="0"/>
+                  <a:rPr lang="sv-SE" dirty="0"/>
                   <a:t>The </a:t>
                 </a:r>
                 <a:r>
-                  <a:rPr lang="sv-SE" b="1" dirty="0" smtClean="0"/>
+                  <a:rPr lang="sv-SE" b="1" dirty="0"/>
                   <a:t>fundamental </a:t>
                 </a:r>
                 <a:r>
-                  <a:rPr lang="sv-SE" b="1" dirty="0" err="1" smtClean="0"/>
+                  <a:rPr lang="sv-SE" b="1" dirty="0" err="1"/>
                   <a:t>torque-producing</a:t>
                 </a:r>
                 <a:r>
-                  <a:rPr lang="sv-SE" b="1" dirty="0" smtClean="0"/>
+                  <a:rPr lang="sv-SE" b="1" dirty="0"/>
                   <a:t> </a:t>
                 </a:r>
                 <a:r>
-                  <a:rPr lang="sv-SE" b="1" dirty="0" err="1" smtClean="0"/>
+                  <a:rPr lang="sv-SE" b="1" dirty="0" err="1"/>
                   <a:t>voltage</a:t>
                 </a:r>
                 <a:r>
-                  <a:rPr lang="sv-SE" b="1" dirty="0" smtClean="0"/>
+                  <a:rPr lang="sv-SE" b="1" dirty="0"/>
                   <a:t> </a:t>
                 </a:r>
                 <a:r>
-                  <a:rPr lang="sv-SE" b="1" dirty="0" err="1" smtClean="0"/>
+                  <a:rPr lang="sv-SE" b="1" dirty="0" err="1"/>
                   <a:t>remains</a:t>
                 </a:r>
                 <a:r>
-                  <a:rPr lang="sv-SE" b="1" dirty="0" smtClean="0"/>
+                  <a:rPr lang="sv-SE" b="1" dirty="0"/>
                   <a:t> </a:t>
                 </a:r>
                 <a:r>
-                  <a:rPr lang="sv-SE" b="1" dirty="0" err="1" smtClean="0"/>
+                  <a:rPr lang="sv-SE" b="1" dirty="0" err="1"/>
                   <a:t>unchanged</a:t>
                 </a:r>
                 <a:r>
-                  <a:rPr lang="sv-SE" dirty="0" smtClean="0"/>
+                  <a:rPr lang="sv-SE" dirty="0"/>
                   <a:t>, </a:t>
                 </a:r>
                 <a:r>
-                  <a:rPr lang="sv-SE" dirty="0" err="1" smtClean="0"/>
+                  <a:rPr lang="sv-SE" dirty="0" err="1"/>
                   <a:t>while</a:t>
                 </a:r>
                 <a:r>
-                  <a:rPr lang="sv-SE" dirty="0" smtClean="0"/>
+                  <a:rPr lang="sv-SE" dirty="0"/>
                   <a:t> the </a:t>
                 </a:r>
                 <a:r>
-                  <a:rPr lang="sv-SE" b="1" dirty="0" err="1" smtClean="0"/>
+                  <a:rPr lang="sv-SE" b="1" dirty="0" err="1"/>
                   <a:t>high-frequency</a:t>
                 </a:r>
                 <a:r>
-                  <a:rPr lang="sv-SE" b="1" dirty="0" smtClean="0"/>
+                  <a:rPr lang="sv-SE" b="1" dirty="0"/>
                   <a:t> </a:t>
                 </a:r>
                 <a:r>
-                  <a:rPr lang="sv-SE" b="1" dirty="0" err="1" smtClean="0"/>
+                  <a:rPr lang="sv-SE" b="1" dirty="0" err="1"/>
                   <a:t>voltage</a:t>
                 </a:r>
                 <a:r>
-                  <a:rPr lang="sv-SE" b="1" dirty="0" smtClean="0"/>
+                  <a:rPr lang="sv-SE" b="1" dirty="0"/>
                   <a:t> </a:t>
                 </a:r>
                 <a:r>
-                  <a:rPr lang="sv-SE" b="1" dirty="0" err="1" smtClean="0"/>
+                  <a:rPr lang="sv-SE" b="1" dirty="0" err="1"/>
                   <a:t>across</a:t>
                 </a:r>
                 <a:r>
-                  <a:rPr lang="sv-SE" b="1" dirty="0" smtClean="0"/>
+                  <a:rPr lang="sv-SE" b="1" dirty="0"/>
                   <a:t> the </a:t>
                 </a:r>
                 <a:r>
-                  <a:rPr lang="sv-SE" b="1" dirty="0" err="1" smtClean="0"/>
+                  <a:rPr lang="sv-SE" b="1" dirty="0" err="1"/>
                   <a:t>phase</a:t>
                 </a:r>
                 <a:r>
-                  <a:rPr lang="sv-SE" b="1" dirty="0" smtClean="0"/>
+                  <a:rPr lang="sv-SE" b="1" dirty="0"/>
                   <a:t> </a:t>
                 </a:r>
                 <a:r>
-                  <a:rPr lang="sv-SE" b="1" dirty="0" err="1" smtClean="0"/>
+                  <a:rPr lang="sv-SE" b="1" dirty="0" err="1"/>
                   <a:t>can</a:t>
                 </a:r>
                 <a:r>
-                  <a:rPr lang="sv-SE" b="1" dirty="0" smtClean="0"/>
+                  <a:rPr lang="sv-SE" b="1" dirty="0"/>
                   <a:t> be </a:t>
                 </a:r>
                 <a:r>
-                  <a:rPr lang="sv-SE" b="1" dirty="0" err="1" smtClean="0"/>
+                  <a:rPr lang="sv-SE" b="1" dirty="0" err="1"/>
                   <a:t>actively</a:t>
                 </a:r>
                 <a:r>
-                  <a:rPr lang="sv-SE" b="1" dirty="0" smtClean="0"/>
+                  <a:rPr lang="sv-SE" b="1" dirty="0"/>
                   <a:t> </a:t>
                 </a:r>
                 <a:r>
-                  <a:rPr lang="sv-SE" b="1" dirty="0" err="1" smtClean="0"/>
+                  <a:rPr lang="sv-SE" b="1" dirty="0" err="1"/>
                   <a:t>controlled</a:t>
                 </a:r>
                 <a:r>
-                  <a:rPr lang="sv-SE" dirty="0" smtClean="0"/>
+                  <a:rPr lang="sv-SE" dirty="0"/>
                   <a:t>.</a:t>
                 </a:r>
-                <a:endParaRPr lang="sv-SE" dirty="0"/>
               </a:p>
             </p:txBody>
           </p:sp>
@@ -4181,7 +4176,7 @@
           <a:lstStyle/>
           <a:p>
             <a:r>
-              <a:rPr lang="en-US" dirty="0" smtClean="0"/>
+              <a:rPr lang="en-US" dirty="0"/>
               <a:t>Parallel Resonant Extraction: Using What Is Already There</a:t>
             </a:r>
             <a:endParaRPr lang="sv-SE" dirty="0"/>
@@ -4214,77 +4209,77 @@
               <a:buNone/>
             </a:pPr>
             <a:r>
-              <a:rPr lang="en-US" dirty="0" smtClean="0"/>
+              <a:rPr lang="en-US" dirty="0"/>
               <a:t>By connecting a </a:t>
             </a:r>
             <a:r>
-              <a:rPr lang="en-US" b="1" dirty="0" smtClean="0"/>
+              <a:rPr lang="en-US" b="1" dirty="0"/>
               <a:t>high-frequency resonant branch</a:t>
             </a:r>
             <a:r>
-              <a:rPr lang="en-US" dirty="0" smtClean="0"/>
+              <a:rPr lang="en-US" dirty="0"/>
               <a:t> (e.g., LC or LCL) </a:t>
             </a:r>
             <a:r>
-              <a:rPr lang="en-US" b="1" dirty="0" smtClean="0"/>
+              <a:rPr lang="en-US" b="1" dirty="0"/>
               <a:t>in parallel with the phase terminals</a:t>
             </a:r>
             <a:r>
-              <a:rPr lang="en-US" dirty="0" smtClean="0"/>
+              <a:rPr lang="en-US" dirty="0"/>
               <a:t>, tuned near the switching frequency:</a:t>
             </a:r>
           </a:p>
           <a:p>
             <a:pPr lvl="1"/>
             <a:r>
-              <a:rPr lang="en-US" dirty="0" smtClean="0"/>
+              <a:rPr lang="en-US" dirty="0"/>
               <a:t>The resonant branch presents </a:t>
             </a:r>
             <a:r>
-              <a:rPr lang="en-US" b="1" dirty="0" smtClean="0"/>
+              <a:rPr lang="en-US" b="1" dirty="0"/>
               <a:t>high impedance at fundamental frequency</a:t>
             </a:r>
-            <a:endParaRPr lang="en-US" dirty="0" smtClean="0"/>
+            <a:endParaRPr lang="en-US" dirty="0"/>
           </a:p>
           <a:p>
             <a:pPr lvl="1"/>
             <a:r>
-              <a:rPr lang="en-US" dirty="0" smtClean="0"/>
+              <a:rPr lang="en-US" dirty="0"/>
               <a:t>And </a:t>
             </a:r>
             <a:r>
-              <a:rPr lang="en-US" b="1" dirty="0" smtClean="0"/>
+              <a:rPr lang="en-US" b="1" dirty="0"/>
               <a:t>low impedance at switching frequency</a:t>
             </a:r>
-            <a:endParaRPr lang="en-US" dirty="0" smtClean="0"/>
+            <a:endParaRPr lang="en-US" dirty="0"/>
           </a:p>
           <a:p>
             <a:pPr marL="0" indent="0">
               <a:buNone/>
             </a:pPr>
             <a:r>
-              <a:rPr lang="en-US" dirty="0" smtClean="0"/>
+              <a:rPr lang="en-US" dirty="0"/>
               <a:t>As a result:</a:t>
             </a:r>
           </a:p>
           <a:p>
             <a:pPr lvl="1"/>
             <a:r>
-              <a:rPr lang="en-US" dirty="0" smtClean="0"/>
+              <a:rPr lang="en-US" dirty="0"/>
               <a:t>The motor current and torque are essentially unaffected</a:t>
             </a:r>
           </a:p>
           <a:p>
             <a:pPr lvl="1"/>
             <a:r>
-              <a:rPr lang="en-US" dirty="0" smtClean="0"/>
+              <a:rPr lang="en-US" dirty="0"/>
               <a:t>Only the switching-frequency voltage excites the resonant branch</a:t>
             </a:r>
           </a:p>
           <a:p>
             <a:pPr lvl="1"/>
             <a:r>
-              <a:rPr lang="en-US" dirty="0" smtClean="0"/>
+              <a:rPr lang="en-US" dirty="0"/>
               <a:t>Auxiliary power is extracted without disturbing main operation</a:t>
             </a:r>
           </a:p>
@@ -4293,36 +4288,36 @@
               <a:buNone/>
             </a:pPr>
             <a:r>
-              <a:rPr lang="en-US" dirty="0" smtClean="0"/>
+              <a:rPr lang="en-US" dirty="0"/>
               <a:t>The auxiliary power level is then </a:t>
             </a:r>
             <a:r>
-              <a:rPr lang="en-US" b="1" dirty="0" smtClean="0"/>
+              <a:rPr lang="en-US" b="1" dirty="0"/>
               <a:t>modulated electrically</a:t>
             </a:r>
             <a:r>
-              <a:rPr lang="en-US" dirty="0" smtClean="0"/>
+              <a:rPr lang="en-US" dirty="0"/>
               <a:t>, not structurally—by adjusting:</a:t>
             </a:r>
           </a:p>
           <a:p>
             <a:pPr lvl="1"/>
             <a:r>
-              <a:rPr lang="en-US" dirty="0" smtClean="0"/>
+              <a:rPr lang="en-US" dirty="0"/>
               <a:t>Carrier phase shift</a:t>
             </a:r>
           </a:p>
           <a:p>
             <a:pPr lvl="1"/>
             <a:r>
-              <a:rPr lang="en-US" dirty="0" smtClean="0"/>
+              <a:rPr lang="en-US" dirty="0"/>
               <a:t>PWM timing</a:t>
             </a:r>
           </a:p>
           <a:p>
             <a:pPr lvl="1"/>
             <a:r>
-              <a:rPr lang="en-US" dirty="0" smtClean="0"/>
+              <a:rPr lang="en-US" dirty="0"/>
               <a:t>Switching alignment</a:t>
             </a:r>
           </a:p>
@@ -4361,6 +4356,42 @@
           </a:prstGeom>
         </p:spPr>
       </p:pic>
+      <p:sp>
+        <p:nvSpPr>
+          <p:cNvPr id="4" name="TextBox 3">
+            <a:extLst>
+              <a:ext uri="{FF2B5EF4-FFF2-40B4-BE49-F238E27FC236}">
+                <a16:creationId xmlns:a16="http://schemas.microsoft.com/office/drawing/2014/main" id="{3AAD7F45-2D3B-A2A1-FF61-B7925FE32E48}"/>
+              </a:ext>
+            </a:extLst>
+          </p:cNvPr>
+          <p:cNvSpPr txBox="1"/>
+          <p:nvPr/>
+        </p:nvSpPr>
+        <p:spPr>
+          <a:xfrm>
+            <a:off x="7767686" y="5550796"/>
+            <a:ext cx="2479249" cy="369332"/>
+          </a:xfrm>
+          <a:prstGeom prst="rect">
+            <a:avLst/>
+          </a:prstGeom>
+          <a:noFill/>
+        </p:spPr>
+        <p:txBody>
+          <a:bodyPr wrap="square" rtlCol="0">
+            <a:spAutoFit/>
+          </a:bodyPr>
+          <a:lstStyle/>
+          <a:p>
+            <a:r>
+              <a:rPr lang="en-US" dirty="0"/>
+              <a:t>Back-up power supply. </a:t>
+            </a:r>
+            <a:endParaRPr lang="sv-SE" dirty="0"/>
+          </a:p>
+        </p:txBody>
+      </p:sp>
     </p:spTree>
     <p:extLst>
       <p:ext uri="{BB962C8B-B14F-4D97-AF65-F5344CB8AC3E}">
@@ -4407,7 +4438,7 @@
           <a:lstStyle/>
           <a:p>
             <a:r>
-              <a:rPr lang="en-US" dirty="0" smtClean="0"/>
+              <a:rPr lang="en-US" dirty="0"/>
               <a:t>Why the Main Inverter Barely Notices</a:t>
             </a:r>
             <a:endParaRPr lang="sv-SE" dirty="0"/>
@@ -4433,71 +4464,71 @@
               <a:buNone/>
             </a:pPr>
             <a:r>
-              <a:rPr lang="en-US" dirty="0" smtClean="0"/>
+              <a:rPr lang="en-US" dirty="0"/>
               <a:t>This is the most important system-level conclusion:</a:t>
             </a:r>
           </a:p>
           <a:p>
             <a:pPr lvl="1"/>
             <a:r>
-              <a:rPr lang="en-US" dirty="0" smtClean="0"/>
+              <a:rPr lang="en-US" dirty="0"/>
               <a:t>Auxiliary power demand: </a:t>
             </a:r>
             <a:r>
-              <a:rPr lang="en-US" b="1" dirty="0" smtClean="0"/>
+              <a:rPr lang="en-US" b="1" dirty="0"/>
               <a:t>several kilowatts</a:t>
             </a:r>
-            <a:endParaRPr lang="en-US" dirty="0" smtClean="0"/>
+            <a:endParaRPr lang="en-US" dirty="0"/>
           </a:p>
           <a:p>
             <a:pPr lvl="1"/>
             <a:r>
-              <a:rPr lang="en-US" dirty="0" smtClean="0"/>
+              <a:rPr lang="en-US" dirty="0"/>
               <a:t>Traction inverter rating: </a:t>
             </a:r>
             <a:r>
-              <a:rPr lang="en-US" b="1" dirty="0" smtClean="0"/>
+              <a:rPr lang="en-US" b="1" dirty="0"/>
               <a:t>hundreds of kilowatts</a:t>
             </a:r>
-            <a:endParaRPr lang="en-US" dirty="0" smtClean="0"/>
+            <a:endParaRPr lang="en-US" dirty="0"/>
           </a:p>
           <a:p>
             <a:pPr marL="0" indent="0">
               <a:buNone/>
             </a:pPr>
             <a:r>
-              <a:rPr lang="en-US" dirty="0" smtClean="0"/>
+              <a:rPr lang="en-US" dirty="0"/>
               <a:t>Even if the auxiliary system draws power through switching harmonics:</a:t>
             </a:r>
           </a:p>
           <a:p>
             <a:pPr lvl="1"/>
             <a:r>
-              <a:rPr lang="en-US" dirty="0" smtClean="0"/>
+              <a:rPr lang="en-US" dirty="0"/>
               <a:t>The </a:t>
             </a:r>
             <a:r>
-              <a:rPr lang="en-US" b="1" dirty="0" smtClean="0"/>
+              <a:rPr lang="en-US" b="1" dirty="0"/>
               <a:t>additional current is small</a:t>
             </a:r>
-            <a:endParaRPr lang="en-US" dirty="0" smtClean="0"/>
+            <a:endParaRPr lang="en-US" dirty="0"/>
           </a:p>
           <a:p>
             <a:pPr lvl="1"/>
             <a:r>
-              <a:rPr lang="en-US" dirty="0" smtClean="0"/>
+              <a:rPr lang="en-US" dirty="0"/>
               <a:t>The </a:t>
             </a:r>
             <a:r>
-              <a:rPr lang="en-US" b="1" dirty="0" smtClean="0"/>
+              <a:rPr lang="en-US" b="1" dirty="0"/>
               <a:t>extra switching loss is marginal</a:t>
             </a:r>
-            <a:endParaRPr lang="en-US" dirty="0" smtClean="0"/>
+            <a:endParaRPr lang="en-US" dirty="0"/>
           </a:p>
           <a:p>
             <a:pPr lvl="1"/>
             <a:r>
-              <a:rPr lang="en-US" dirty="0" smtClean="0"/>
+              <a:rPr lang="en-US" dirty="0"/>
               <a:t>Thermal impact is negligible compared to traction load</a:t>
             </a:r>
           </a:p>
@@ -4552,7 +4583,7 @@
           <a:lstStyle/>
           <a:p>
             <a:r>
-              <a:rPr lang="en-US" dirty="0" smtClean="0"/>
+              <a:rPr lang="en-US" dirty="0"/>
               <a:t>What Is Eliminated (and Why It Matters)</a:t>
             </a:r>
             <a:endParaRPr lang="sv-SE" dirty="0"/>
@@ -4629,7 +4660,7 @@
           <a:lstStyle/>
           <a:p>
             <a:r>
-              <a:rPr lang="en-US" dirty="0" smtClean="0"/>
+              <a:rPr lang="en-US" dirty="0"/>
               <a:t>A Shift in Design Philosophy</a:t>
             </a:r>
             <a:endParaRPr lang="sv-SE" dirty="0"/>
@@ -4657,21 +4688,21 @@
               <a:buNone/>
             </a:pPr>
             <a:r>
-              <a:rPr lang="en-US" dirty="0" smtClean="0"/>
+              <a:rPr lang="en-US" dirty="0"/>
               <a:t>The classical EV approach separates:</a:t>
             </a:r>
           </a:p>
           <a:p>
             <a:pPr lvl="1"/>
             <a:r>
-              <a:rPr lang="en-US" dirty="0" smtClean="0"/>
+              <a:rPr lang="en-US" dirty="0"/>
               <a:t>Main power conversion</a:t>
             </a:r>
           </a:p>
           <a:p>
             <a:pPr lvl="1"/>
             <a:r>
-              <a:rPr lang="en-US" dirty="0" smtClean="0"/>
+              <a:rPr lang="en-US" dirty="0"/>
               <a:t>Auxiliary power conversion</a:t>
             </a:r>
           </a:p>
@@ -4680,7 +4711,7 @@
               <a:buNone/>
             </a:pPr>
             <a:r>
-              <a:rPr lang="en-US" dirty="0" smtClean="0"/>
+              <a:rPr lang="en-US" dirty="0"/>
               <a:t>The OEW + modulation-controlled resonant extraction approach unifies them.</a:t>
             </a:r>
           </a:p>
@@ -4689,42 +4720,42 @@
               <a:buNone/>
             </a:pPr>
             <a:r>
-              <a:rPr lang="en-US" dirty="0" smtClean="0"/>
+              <a:rPr lang="en-US" dirty="0"/>
               <a:t>This aligns naturally with:</a:t>
             </a:r>
           </a:p>
           <a:p>
             <a:pPr lvl="1"/>
             <a:r>
-              <a:rPr lang="en-US" dirty="0" smtClean="0"/>
+              <a:rPr lang="en-US" dirty="0"/>
               <a:t>High-voltage EV platforms (800–1200 V)</a:t>
             </a:r>
           </a:p>
           <a:p>
             <a:pPr lvl="1"/>
             <a:r>
-              <a:rPr lang="en-US" dirty="0" smtClean="0"/>
+              <a:rPr lang="en-US" dirty="0"/>
               <a:t>Power-density-driven designs</a:t>
             </a:r>
           </a:p>
           <a:p>
             <a:pPr lvl="1"/>
             <a:r>
-              <a:rPr lang="en-US" dirty="0" smtClean="0"/>
+              <a:rPr lang="en-US" dirty="0"/>
               <a:t>Life-cycle and sustainability optimization</a:t>
             </a:r>
           </a:p>
           <a:p>
             <a:pPr lvl="1"/>
             <a:r>
-              <a:rPr lang="en-US" dirty="0" smtClean="0"/>
+              <a:rPr lang="en-US" dirty="0"/>
               <a:t>Advanced modulation </a:t>
             </a:r>
             <a:r>
-              <a:rPr lang="en-US" dirty="0" err="1" smtClean="0"/>
+              <a:rPr lang="en-US" dirty="0" err="1"/>
               <a:t>tecniques</a:t>
             </a:r>
-            <a:endParaRPr lang="en-US" dirty="0" smtClean="0"/>
+            <a:endParaRPr lang="en-US" dirty="0"/>
           </a:p>
           <a:p>
             <a:endParaRPr lang="sv-SE" dirty="0"/>
